--- a/templates/samples/template_teal.pptx
+++ b/templates/samples/template_teal.pptx
@@ -1061,7 +1061,7 @@
             <a:avLst/>
           </a:prstGeom>
           <a:solidFill>
-            <a:srgbClr val="009E73"/>
+            <a:srgbClr val="5B2C8E"/>
           </a:solidFill>
           <a:ln/>
         </p:spPr>
@@ -1081,7 +1081,29 @@
             <a:avLst/>
           </a:prstGeom>
           <a:solidFill>
-            <a:srgbClr val="007A55">
+            <a:srgbClr val="3B1C6E">
+              <a:alpha val="50000"/>
+            </a:srgbClr>
+          </a:solidFill>
+          <a:ln/>
+        </p:spPr>
+      </p:sp>
+      <p:sp>
+        <p:nvSpPr>
+          <p:cNvPr id="4" name="Shape 2"/>
+          <p:cNvSpPr/>
+          <p:nvPr/>
+        </p:nvSpPr>
+        <p:spPr>
+          <a:xfrm>
+            <a:off x="6858000" y="457200"/>
+            <a:ext cx="2286000" cy="2286000"/>
+          </a:xfrm>
+          <a:prstGeom prst="ellipse">
+            <a:avLst/>
+          </a:prstGeom>
+          <a:solidFill>
+            <a:srgbClr val="E8DAEF">
               <a:alpha val="40000"/>
             </a:srgbClr>
           </a:solidFill>
@@ -1090,28 +1112,6 @@
       </p:sp>
       <p:sp>
         <p:nvSpPr>
-          <p:cNvPr id="4" name="Shape 2"/>
-          <p:cNvSpPr/>
-          <p:nvPr/>
-        </p:nvSpPr>
-        <p:spPr>
-          <a:xfrm>
-            <a:off x="6858000" y="457200"/>
-            <a:ext cx="2286000" cy="2286000"/>
-          </a:xfrm>
-          <a:prstGeom prst="ellipse">
-            <a:avLst/>
-          </a:prstGeom>
-          <a:solidFill>
-            <a:srgbClr val="D5F5E3">
-              <a:alpha val="35000"/>
-            </a:srgbClr>
-          </a:solidFill>
-          <a:ln/>
-        </p:spPr>
-      </p:sp>
-      <p:sp>
-        <p:nvSpPr>
           <p:cNvPr id="5" name="Shape 3"/>
           <p:cNvSpPr/>
           <p:nvPr/>
@@ -1145,7 +1145,7 @@
             <a:avLst/>
           </a:prstGeom>
           <a:solidFill>
-            <a:srgbClr val="007A55"/>
+            <a:srgbClr val="3B1C6E"/>
           </a:solidFill>
           <a:ln/>
         </p:spPr>
@@ -1177,7 +1177,7 @@
             <a:r>
               <a:rPr lang="en-US" sz="1400" dirty="0">
                 <a:solidFill>
-                  <a:srgbClr val="D5F5E3"/>
+                  <a:srgbClr val="E8DAEF"/>
                 </a:solidFill>
                 <a:latin typeface="Arial" pitchFamily="34" charset="0"/>
                 <a:ea typeface="Arial" pitchFamily="34" charset="-122"/>
@@ -1255,7 +1255,7 @@
             <a:r>
               <a:rPr lang="en-US" sz="1500" dirty="0">
                 <a:solidFill>
-                  <a:srgbClr val="D5F5E3"/>
+                  <a:srgbClr val="E8DAEF"/>
                 </a:solidFill>
                 <a:latin typeface="Arial" pitchFamily="34" charset="0"/>
                 <a:ea typeface="Arial" pitchFamily="34" charset="-122"/>
@@ -1475,7 +1475,7 @@
             <a:avLst/>
           </a:prstGeom>
           <a:solidFill>
-            <a:srgbClr val="009E73"/>
+            <a:srgbClr val="5B2C8E"/>
           </a:solidFill>
           <a:ln/>
         </p:spPr>
@@ -1495,7 +1495,7 @@
             <a:avLst/>
           </a:prstGeom>
           <a:solidFill>
-            <a:srgbClr val="D5F5E3"/>
+            <a:srgbClr val="E8DAEF"/>
           </a:solidFill>
           <a:ln/>
         </p:spPr>
@@ -1615,7 +1615,7 @@
             <a:avLst/>
           </a:prstGeom>
           <a:solidFill>
-            <a:srgbClr val="009E73"/>
+            <a:srgbClr val="5B2C8E"/>
           </a:solidFill>
           <a:ln/>
         </p:spPr>
@@ -1827,7 +1827,7 @@
             <a:avLst/>
           </a:prstGeom>
           <a:solidFill>
-            <a:srgbClr val="D5F5E3"/>
+            <a:srgbClr val="E8DAEF"/>
           </a:solidFill>
           <a:ln/>
         </p:spPr>
@@ -1859,7 +1859,7 @@
             <a:r>
               <a:rPr lang="en-US" sz="1600" dirty="0">
                 <a:solidFill>
-                  <a:srgbClr val="009E73"/>
+                  <a:srgbClr val="5B2C8E"/>
                 </a:solidFill>
                 <a:latin typeface="Arial" pitchFamily="34" charset="0"/>
                 <a:ea typeface="Arial" pitchFamily="34" charset="-122"/>
@@ -1911,7 +1911,7 @@
             <a:avLst/>
           </a:prstGeom>
           <a:solidFill>
-            <a:srgbClr val="009E73"/>
+            <a:srgbClr val="5B2C8E"/>
           </a:solidFill>
           <a:ln/>
         </p:spPr>
@@ -1931,8 +1931,8 @@
             <a:avLst/>
           </a:prstGeom>
           <a:solidFill>
-            <a:srgbClr val="007A55">
-              <a:alpha val="35000"/>
+            <a:srgbClr val="3B1C6E">
+              <a:alpha val="45000"/>
             </a:srgbClr>
           </a:solidFill>
           <a:ln/>
@@ -1953,8 +1953,8 @@
             <a:avLst/>
           </a:prstGeom>
           <a:solidFill>
-            <a:srgbClr val="D5F5E3">
-              <a:alpha val="30000"/>
+            <a:srgbClr val="E8DAEF">
+              <a:alpha val="35000"/>
             </a:srgbClr>
           </a:solidFill>
           <a:ln/>
